--- a/PBL_Project_Poster_DBMS_Completed.pptx
+++ b/PBL_Project_Poster_DBMS_Completed.pptx
@@ -899,6 +899,10 @@
             <a:prstDash val="solid"/>
           </a:ln>
         </p:spPr>
+        <p:txBody>
+          <a:bodyPr/>
+          <a:p/>
+        </p:txBody>
       </p:sp>
       <p:sp>
         <p:nvSpPr>
@@ -924,6 +928,10 @@
             <a:prstDash val="solid"/>
           </a:ln>
         </p:spPr>
+        <p:txBody>
+          <a:bodyPr/>
+          <a:p/>
+        </p:txBody>
       </p:sp>
       <p:sp>
         <p:nvSpPr>
@@ -1004,13 +1012,7 @@
           </a:p>
           <a:p>
             <a:r>
-              <a:rPr sz="1250" b="0">
-                <a:solidFill>
-                  <a:srgbClr val="1E293B"/>
-                </a:solidFill>
-                <a:latin typeface="Calibri"/>
-              </a:rPr>
-              <a:t>Team ID: BV-PBL-042  |  Section: S-14  |  Members: J. SAI SATYAN - 2520030088,  M. TANMAYEE - 2520030339,  K. DEVIKA - 2520030329  |  Guide: Dr. K. V. Ramanathan</a:t>
+              <a:t>Team ID: BV-PBL-042  |  Section: S-14 (CSE)  |  Author: J. SAI SATYAN  |  Guide: Dr. K. V. Ramanathan</a:t>
             </a:r>
           </a:p>
           <a:p>
@@ -1052,6 +1054,10 @@
             <a:prstDash val="solid"/>
           </a:ln>
         </p:spPr>
+        <p:txBody>
+          <a:bodyPr/>
+          <a:p/>
+        </p:txBody>
       </p:sp>
       <p:sp>
         <p:nvSpPr>
@@ -1170,6 +1176,10 @@
             <a:prstDash val="solid"/>
           </a:ln>
         </p:spPr>
+        <p:txBody>
+          <a:bodyPr/>
+          <a:p/>
+        </p:txBody>
       </p:sp>
       <p:sp>
         <p:nvSpPr>
@@ -1321,6 +1331,10 @@
             <a:prstDash val="solid"/>
           </a:ln>
         </p:spPr>
+        <p:txBody>
+          <a:bodyPr/>
+          <a:p/>
+        </p:txBody>
       </p:sp>
       <p:sp>
         <p:nvSpPr>
@@ -2420,6 +2434,10 @@
             <a:prstDash val="solid"/>
           </a:ln>
         </p:spPr>
+        <p:txBody>
+          <a:bodyPr/>
+          <a:p/>
+        </p:txBody>
       </p:sp>
       <p:sp>
         <p:nvSpPr>
@@ -2560,6 +2578,10 @@
             <a:prstDash val="solid"/>
           </a:ln>
         </p:spPr>
+        <p:txBody>
+          <a:bodyPr/>
+          <a:p/>
+        </p:txBody>
       </p:sp>
       <p:sp>
         <p:nvSpPr>
@@ -2700,6 +2722,10 @@
             <a:prstDash val="solid"/>
           </a:ln>
         </p:spPr>
+        <p:txBody>
+          <a:bodyPr/>
+          <a:p/>
+        </p:txBody>
       </p:sp>
       <p:sp>
         <p:nvSpPr>
@@ -2764,6 +2790,10 @@
             <a:prstDash val="dash"/>
           </a:ln>
         </p:spPr>
+        <p:txBody>
+          <a:bodyPr/>
+          <a:p/>
+        </p:txBody>
       </p:sp>
       <p:sp>
         <p:nvSpPr>
@@ -2814,6 +2844,10 @@
             <a:prstDash val="solid"/>
           </a:ln>
         </p:spPr>
+        <p:txBody>
+          <a:bodyPr/>
+          <a:p/>
+        </p:txBody>
       </p:sp>
       <p:sp>
         <p:nvSpPr>
@@ -2878,6 +2912,10 @@
             <a:prstDash val="dash"/>
           </a:ln>
         </p:spPr>
+        <p:txBody>
+          <a:bodyPr/>
+          <a:p/>
+        </p:txBody>
       </p:sp>
       <p:sp>
         <p:nvSpPr>
@@ -2928,6 +2966,10 @@
             <a:prstDash val="solid"/>
           </a:ln>
         </p:spPr>
+        <p:txBody>
+          <a:bodyPr/>
+          <a:p/>
+        </p:txBody>
       </p:sp>
       <p:sp>
         <p:nvSpPr>
@@ -2992,6 +3034,10 @@
             <a:prstDash val="dash"/>
           </a:ln>
         </p:spPr>
+        <p:txBody>
+          <a:bodyPr/>
+          <a:p/>
+        </p:txBody>
       </p:sp>
       <p:sp>
         <p:nvSpPr>
@@ -3040,6 +3086,10 @@
             <a:prstDash val="dash"/>
           </a:ln>
         </p:spPr>
+        <p:txBody>
+          <a:bodyPr/>
+          <a:p/>
+        </p:txBody>
       </p:sp>
       <p:sp>
         <p:nvSpPr>
@@ -3090,6 +3140,10 @@
             <a:prstDash val="solid"/>
           </a:ln>
         </p:spPr>
+        <p:txBody>
+          <a:bodyPr/>
+          <a:p/>
+        </p:txBody>
       </p:sp>
       <p:sp>
         <p:nvSpPr>
@@ -3230,6 +3284,10 @@
             <a:prstDash val="solid"/>
           </a:ln>
         </p:spPr>
+        <p:txBody>
+          <a:bodyPr/>
+          <a:p/>
+        </p:txBody>
       </p:sp>
       <p:sp>
         <p:nvSpPr>
@@ -3348,6 +3406,10 @@
             <a:prstDash val="solid"/>
           </a:ln>
         </p:spPr>
+        <p:txBody>
+          <a:bodyPr/>
+          <a:p/>
+        </p:txBody>
       </p:sp>
       <p:sp>
         <p:nvSpPr>
@@ -3515,6 +3577,10 @@
             <a:prstDash val="dash"/>
           </a:ln>
         </p:spPr>
+        <p:txBody>
+          <a:bodyPr/>
+          <a:p/>
+        </p:txBody>
       </p:sp>
       <p:sp>
         <p:nvSpPr>
